--- a/jma_mcp_intro.pptx
+++ b/jma_mcp_intro.pptx
@@ -3461,7 +3461,7 @@
         </p:spPr>
         <p:txBody>
           <a:bodyPr wrap="square">
-            <a:spAutoFit/>
+            <a:normAutofit/>
           </a:bodyPr>
           <a:lstStyle/>
           <a:p>
@@ -3624,7 +3624,7 @@
         </p:spPr>
         <p:txBody>
           <a:bodyPr wrap="square">
-            <a:spAutoFit/>
+            <a:normAutofit/>
           </a:bodyPr>
           <a:lstStyle/>
           <a:p>
@@ -3890,7 +3890,7 @@
         </p:spPr>
         <p:txBody>
           <a:bodyPr wrap="square">
-            <a:spAutoFit/>
+            <a:normAutofit/>
           </a:bodyPr>
           <a:lstStyle/>
           <a:p>
@@ -4047,7 +4047,7 @@
         </p:spPr>
         <p:txBody>
           <a:bodyPr wrap="square">
-            <a:spAutoFit/>
+            <a:normAutofit/>
           </a:bodyPr>
           <a:lstStyle/>
           <a:p>
@@ -4229,7 +4229,7 @@
         </p:spPr>
         <p:txBody>
           <a:bodyPr wrap="square">
-            <a:spAutoFit/>
+            <a:normAutofit/>
           </a:bodyPr>
           <a:lstStyle/>
           <a:p>
@@ -4447,7 +4447,7 @@
         </p:spPr>
         <p:txBody>
           <a:bodyPr wrap="square">
-            <a:spAutoFit/>
+            <a:normAutofit/>
           </a:bodyPr>
           <a:lstStyle/>
           <a:p>
@@ -4677,7 +4677,7 @@
         </p:spPr>
         <p:txBody>
           <a:bodyPr wrap="square">
-            <a:spAutoFit/>
+            <a:normAutofit/>
           </a:bodyPr>
           <a:lstStyle/>
           <a:p>
@@ -4895,7 +4895,7 @@
         </p:spPr>
         <p:txBody>
           <a:bodyPr wrap="square">
-            <a:spAutoFit/>
+            <a:normAutofit/>
           </a:bodyPr>
           <a:lstStyle/>
           <a:p>
@@ -5113,7 +5113,7 @@
         </p:spPr>
         <p:txBody>
           <a:bodyPr wrap="square">
-            <a:spAutoFit/>
+            <a:normAutofit/>
           </a:bodyPr>
           <a:lstStyle/>
           <a:p>
@@ -5343,7 +5343,7 @@
         </p:spPr>
         <p:txBody>
           <a:bodyPr wrap="square">
-            <a:spAutoFit/>
+            <a:normAutofit/>
           </a:bodyPr>
           <a:lstStyle/>
           <a:p>
@@ -5500,7 +5500,7 @@
         </p:spPr>
         <p:txBody>
           <a:bodyPr wrap="square">
-            <a:spAutoFit/>
+            <a:normAutofit/>
           </a:bodyPr>
           <a:lstStyle/>
           <a:p>

--- a/jma_mcp_intro.pptx
+++ b/jma_mcp_intro.pptx
@@ -3881,7 +3881,7 @@
         <p:spPr>
           <a:xfrm>
             <a:off x="731520" y="1371600"/>
-            <a:ext cx="10698480" cy="4206240"/>
+            <a:ext cx="10698480" cy="2931160"/>
           </a:xfrm>
           <a:prstGeom prst="rect">
             <a:avLst/>
@@ -3951,7 +3951,7 @@
         </p:nvSpPr>
         <p:spPr>
           <a:xfrm>
-            <a:off x="731520" y="5486400"/>
+            <a:off x="731520" y="4302760"/>
             <a:ext cx="10698480" cy="822960"/>
           </a:xfrm>
           <a:prstGeom prst="rect">
@@ -3994,7 +3994,7 @@
         </p:nvSpPr>
         <p:spPr>
           <a:xfrm>
-            <a:off x="731520" y="5486400"/>
+            <a:off x="731520" y="4302760"/>
             <a:ext cx="54864" cy="822960"/>
           </a:xfrm>
           <a:prstGeom prst="rect">
@@ -4037,7 +4037,7 @@
         </p:nvSpPr>
         <p:spPr>
           <a:xfrm>
-            <a:off x="960120" y="5559552"/>
+            <a:off x="960120" y="4375912"/>
             <a:ext cx="10332720" cy="676656"/>
           </a:xfrm>
           <a:prstGeom prst="rect">
@@ -4220,7 +4220,7 @@
         <p:spPr>
           <a:xfrm>
             <a:off x="731520" y="1371600"/>
-            <a:ext cx="10698480" cy="4206240"/>
+            <a:ext cx="10698480" cy="2581910"/>
           </a:xfrm>
           <a:prstGeom prst="rect">
             <a:avLst/>
@@ -4438,7 +4438,7 @@
         <p:spPr>
           <a:xfrm>
             <a:off x="731520" y="1371600"/>
-            <a:ext cx="10698480" cy="4206240"/>
+            <a:ext cx="10698480" cy="2232660"/>
           </a:xfrm>
           <a:prstGeom prst="rect">
             <a:avLst/>
@@ -4668,7 +4668,7 @@
         <p:spPr>
           <a:xfrm>
             <a:off x="731520" y="1371600"/>
-            <a:ext cx="10698480" cy="4206240"/>
+            <a:ext cx="10698480" cy="2931160"/>
           </a:xfrm>
           <a:prstGeom prst="rect">
             <a:avLst/>
@@ -4886,7 +4886,7 @@
         <p:spPr>
           <a:xfrm>
             <a:off x="731520" y="1371600"/>
-            <a:ext cx="10698480" cy="4206240"/>
+            <a:ext cx="10698480" cy="1883410"/>
           </a:xfrm>
           <a:prstGeom prst="rect">
             <a:avLst/>
@@ -5104,7 +5104,7 @@
         <p:spPr>
           <a:xfrm>
             <a:off x="731520" y="1371600"/>
-            <a:ext cx="10698480" cy="4206240"/>
+            <a:ext cx="10698480" cy="2232660"/>
           </a:xfrm>
           <a:prstGeom prst="rect">
             <a:avLst/>
@@ -5334,7 +5334,7 @@
         <p:spPr>
           <a:xfrm>
             <a:off x="731520" y="1371600"/>
-            <a:ext cx="10698480" cy="4206240"/>
+            <a:ext cx="10698480" cy="2931160"/>
           </a:xfrm>
           <a:prstGeom prst="rect">
             <a:avLst/>
@@ -5404,7 +5404,7 @@
         </p:nvSpPr>
         <p:spPr>
           <a:xfrm>
-            <a:off x="731520" y="5486400"/>
+            <a:off x="731520" y="4302760"/>
             <a:ext cx="10698480" cy="822960"/>
           </a:xfrm>
           <a:prstGeom prst="rect">
@@ -5447,7 +5447,7 @@
         </p:nvSpPr>
         <p:spPr>
           <a:xfrm>
-            <a:off x="731520" y="5486400"/>
+            <a:off x="731520" y="4302760"/>
             <a:ext cx="54864" cy="822960"/>
           </a:xfrm>
           <a:prstGeom prst="rect">
@@ -5490,7 +5490,7 @@
         </p:nvSpPr>
         <p:spPr>
           <a:xfrm>
-            <a:off x="960120" y="5559552"/>
+            <a:off x="960120" y="4375912"/>
             <a:ext cx="10332720" cy="676656"/>
           </a:xfrm>
           <a:prstGeom prst="rect">
